--- a/lab4/Лабораторная_4_вариант_9.pptx
+++ b/lab4/Лабораторная_4_вариант_9.pptx
@@ -3740,11 +3740,11 @@
         <p:spPr>
           <a:xfrm>
             <a:off x="7882127" y="1965960"/>
-            <a:ext cx="3483864" cy="2651760"/>
+            <a:ext cx="3483864" cy="3721608"/>
           </a:xfrm>
           <a:prstGeom prst="roundRect">
             <a:avLst>
-              <a:gd name="adj" fmla="val 4827"/>
+              <a:gd name="adj" fmla="val 3674"/>
             </a:avLst>
           </a:prstGeom>
           <a:solidFill>
@@ -3772,7 +3772,7 @@
         <p:spPr>
           <a:xfrm>
             <a:off x="8119871" y="2203704"/>
-            <a:ext cx="50292" cy="2176272"/>
+            <a:ext cx="50292" cy="3246120"/>
           </a:xfrm>
           <a:prstGeom prst="roundRect">
             <a:avLst>
@@ -3804,7 +3804,7 @@
         <p:spPr>
           <a:xfrm>
             <a:off x="8430767" y="2221991"/>
-            <a:ext cx="2642616" cy="2139696"/>
+            <a:ext cx="2642616" cy="3209544"/>
           </a:xfrm>
           <a:prstGeom prst="rect">
             <a:avLst/>
@@ -3832,7 +3832,7 @@
               </a:defRPr>
             </a:pPr>
             <a:r>
-              <a:t>Усреднение 11 × 11 меняет кадр почти вдвое сильнее, чем 5 × 5. Медианный фильтр, наоборот, приближает зашумлённый кадр к исходному: ошибка падает с 6.34 до 4.44. Sharpen меняет немного, но прицельно — только на границах.</a:t>
+              <a:t>Усреднение 11 × 11 меняет кадр почти вдвое сильнее, чем 5 × 5. Медианный фильтр, наоборот, приближает зашумлённый кадр к исходному: ошибка падает с 6.34 до 4.44. Для диаграммы значение sharpen показывает отклонение всей цепочки от исходника; на слайде 04 отдельно сравниваются размытый вход и результат sharpen.</a:t>
             </a:r>
           </a:p>
         </p:txBody>
@@ -8586,7 +8586,7 @@
               </a:defRPr>
             </a:pPr>
             <a:r>
-              <a:t>Ядро sharpen повысило локальный контраст, изменив кадр на 5.62</a:t>
+              <a:t>Sharpen изменил размытый вход на 3.19 уровня яркости в среднем</a:t>
             </a:r>
           </a:p>
         </p:txBody>
@@ -12861,7 +12861,7 @@
               </a:defRPr>
             </a:pPr>
             <a:r>
-              <a:t>Центр ядра больше единицы, соседи отрицательны</a:t>
+              <a:t>Усиливаем детали размытого изображения</a:t>
             </a:r>
           </a:p>
         </p:txBody>
@@ -12967,7 +12967,7 @@
         <p:spPr>
           <a:xfrm>
             <a:off x="822960" y="1965960"/>
-            <a:ext cx="7360920" cy="2336292"/>
+            <a:ext cx="7360920" cy="2350008"/>
           </a:xfrm>
           <a:prstGeom prst="rect">
             <a:avLst/>
@@ -13050,7 +13050,7 @@
               </a:defRPr>
             </a:pPr>
             <a:r>
-              <a:t>5.62</a:t>
+              <a:t>3.19</a:t>
             </a:r>
           </a:p>
         </p:txBody>
@@ -13092,7 +13092,7 @@
               </a:defRPr>
             </a:pPr>
             <a:r>
-              <a:t>среднее изменение относительно исходного</a:t>
+              <a:t>изменение относительно размытого входа</a:t>
             </a:r>
           </a:p>
         </p:txBody>
@@ -13221,7 +13221,7 @@
         </p:nvSpPr>
         <p:spPr>
           <a:xfrm>
-            <a:off x="822960" y="4539996"/>
+            <a:off x="822960" y="4553712"/>
             <a:ext cx="7360920" cy="1261668"/>
           </a:xfrm>
           <a:prstGeom prst="roundRect">
@@ -13253,7 +13253,7 @@
         </p:nvSpPr>
         <p:spPr>
           <a:xfrm>
-            <a:off x="822960" y="4759452"/>
+            <a:off x="822960" y="4773168"/>
             <a:ext cx="50292" cy="822756"/>
           </a:xfrm>
           <a:prstGeom prst="roundRect">
@@ -13285,7 +13285,7 @@
         </p:nvSpPr>
         <p:spPr>
           <a:xfrm>
-            <a:off x="1207008" y="4777740"/>
+            <a:off x="1207008" y="4791455"/>
             <a:ext cx="6702552" cy="786180"/>
           </a:xfrm>
           <a:prstGeom prst="rect">
@@ -13365,7 +13365,7 @@
         </p:nvSpPr>
         <p:spPr>
           <a:xfrm>
-            <a:off x="822960" y="6021120"/>
+            <a:off x="822960" y="5925108"/>
             <a:ext cx="10543032" cy="274320"/>
           </a:xfrm>
           <a:prstGeom prst="rect">
@@ -13394,7 +13394,7 @@
               </a:defRPr>
             </a:pPr>
             <a:r>
-              <a:t>Ядро усиливает разницу между центром и соседями: границы становятся контрастнее, но вместе с ними усиливаются шум и ореолы.</a:t>
+              <a:t>Обе панели показывают одну цепочку обработки: слева вход sharpen, справа результат. Усиление контуров может сопровождаться ореолами.</a:t>
             </a:r>
           </a:p>
         </p:txBody>
